--- a/lecons/USA/Environment and Development/01_USA_ENV_L01_Pollution.pptx
+++ b/lecons/USA/Environment and Development/01_USA_ENV_L01_Pollution.pptx
@@ -3377,7 +3377,7 @@
           <a:p>
             <a:r>
               <a:rPr lang="en-US" dirty="0"/>
-              <a:t>We continue with Air Pollution. Copy this carefully. When you finish, we go to the next slide.</a:t>
+              <a:t>We continue with Air Pollution. On this slide we have Bush fires also pollute the air in the dry season.. Write each point on a new line, with the key term first, and explain it in your own words when we revise. When you finish, we go to the next slide.</a:t>
             </a:r>
             <a:endParaRPr lang="en-US" dirty="0"/>
           </a:p>
@@ -3817,7 +3817,7 @@
           <a:p>
             <a:r>
               <a:rPr lang="en-US" dirty="0"/>
-              <a:t>We continue with Water and Land Pollution. Copy this carefully. When you finish, we go to the next slide.</a:t>
+              <a:t>We continue with Water and Land Pollution. On this slide we have Fertilisers cause eutrophication, in which algae grow and use up the oxygen, so fish die.. Write each point on a new line, with the key term first, and explain it in your own words when we revise. When you finish, we go to the next slide.</a:t>
             </a:r>
             <a:endParaRPr lang="en-US" dirty="0"/>
           </a:p>

--- a/lecons/USA/Environment and Development/01_USA_ENV_L01_Pollution.pptx
+++ b/lecons/USA/Environment and Development/01_USA_ENV_L01_Pollution.pptx
@@ -3465,7 +3465,7 @@
           <a:p>
             <a:r>
               <a:rPr lang="en-US" dirty="0"/>
-              <a:t>Before we start the new lesson, let us correct the homework I gave you at the end of Further Study 7: Tourism Development in Cameroon. The question was: Prepare a short advertisement for a tourist site in your region. Take out your exercise books.</a:t>
+              <a:t>Before we start the new lesson, let us correct the homework I gave you at the end of Lesson 31: Tourism. The question was: Name two causes of air pollution in your town. Take out your exercise books.</a:t>
             </a:r>
             <a:endParaRPr lang="en-US" dirty="0"/>
           </a:p>
@@ -4433,7 +4433,7 @@
           <a:p>
             <a:r>
               <a:rPr lang="en-US" dirty="0"/>
-              <a:t>Here is a good answer. Answers vary. A good advertisement names the site and region, shows what to see and do, how to get there, where to stay and a catchy slogan. Compare it with your own answer and correct your work in red.</a:t>
+              <a:t>Here is a good answer. Examples: vehicle and motorbike exhaust, smoke from firewood and bush fires, dust, factory smoke (any two). Compare it with your own answer and correct your work in red.</a:t>
             </a:r>
             <a:endParaRPr lang="en-US" dirty="0"/>
           </a:p>
@@ -15587,7 +15587,7 @@
                 <a:ea typeface="Times New Roman" pitchFamily="34" charset="-122"/>
                 <a:cs typeface="Times New Roman" pitchFamily="34" charset="-120"/>
               </a:rPr>
-              <a:t>Question (Further Study 7: Tourism Development in Cameroon):</a:t>
+              <a:t>Question (Lesson 31: Tourism):</a:t>
             </a:r>
             <a:endParaRPr lang="en-US" sz="4000" dirty="0"/>
           </a:p>
@@ -15607,7 +15607,7 @@
                 <a:ea typeface="Times New Roman" pitchFamily="34" charset="-122"/>
                 <a:cs typeface="Times New Roman" pitchFamily="34" charset="-120"/>
               </a:rPr>
-              <a:t>Prepare a short advertisement for a tourist site in your region.</a:t>
+              <a:t>Name two causes of air pollution in your town.</a:t>
             </a:r>
             <a:endParaRPr lang="en-US" sz="4000" dirty="0"/>
           </a:p>
@@ -18304,7 +18304,7 @@
                 <a:ea typeface="Times New Roman" pitchFamily="34" charset="-122"/>
                 <a:cs typeface="Times New Roman" pitchFamily="34" charset="-120"/>
               </a:rPr>
-              <a:t>Answers vary. A good advertisement names the site and region, shows what to see and do, how to get there, where to stay and a catchy slogan.</a:t>
+              <a:t>Examples: vehicle and motorbike exhaust, smoke from firewood and bush fires, dust, factory smoke (any two).</a:t>
             </a:r>
             <a:endParaRPr lang="en-US" sz="4000" dirty="0"/>
           </a:p>
